--- a/docs/ANTON-Markets-Analytics.pptx
+++ b/docs/ANTON-Markets-Analytics.pptx
@@ -4064,7 +4064,7 @@
                 <a:ea typeface="Consolas" pitchFamily="34" charset="-122"/>
                 <a:cs typeface="Consolas" pitchFamily="34" charset="-120"/>
               </a:rPr>
-              <a:t>490</a:t>
+              <a:t>505</a:t>
             </a:r>
             <a:endParaRPr lang="en-US" sz="2300" dirty="0"/>
           </a:p>
@@ -4103,7 +4103,7 @@
                 <a:ea typeface="Georgia" pitchFamily="34" charset="-122"/>
                 <a:cs typeface="Georgia" pitchFamily="34" charset="-120"/>
               </a:rPr>
-              <a:t>110 resolved · 132 live</a:t>
+              <a:t>126 resolved · 134 live</a:t>
             </a:r>
             <a:endParaRPr lang="en-US" sz="1000" dirty="0"/>
           </a:p>
@@ -4774,7 +4774,7 @@
                 <a:ea typeface="Consolas" pitchFamily="34" charset="-122"/>
                 <a:cs typeface="Consolas" pitchFamily="34" charset="-120"/>
               </a:rPr>
-              <a:t>0.020</a:t>
+              <a:t>0.074</a:t>
             </a:r>
             <a:endParaRPr lang="en-US" sz="2300" dirty="0"/>
           </a:p>
@@ -4813,7 +4813,7 @@
                 <a:ea typeface="Georgia" pitchFamily="34" charset="-122"/>
                 <a:cs typeface="Georgia" pitchFamily="34" charset="-120"/>
               </a:rPr>
-              <a:t>Stated 0.553 vs actual 0.533</a:t>
+              <a:t>Stated 0.547 vs actual 0.474</a:t>
             </a:r>
             <a:endParaRPr lang="en-US" sz="1000" dirty="0"/>
           </a:p>
@@ -9615,7 +9615,7 @@
                 <a:ea typeface="Georgia" pitchFamily="34" charset="-122"/>
                 <a:cs typeface="Georgia" pitchFamily="34" charset="-120"/>
               </a:rPr>
-              <a:t>Live figures, not a backtest — presented as the system reports them, including where they are unflattering.</a:t>
+              <a:t>Live figures, not a backtest — presented as the system reports them, including where they are unflattering. Corrected 23 Aug 2026: Brier had been scored against a partial-credit grade rather than the binary outcome, which understated it. All figures are post-correction.</a:t>
             </a:r>
             <a:endParaRPr lang="en-US" sz="1300" dirty="0"/>
           </a:p>
@@ -10075,7 +10075,7 @@
                           <a:ea typeface="Consolas" pitchFamily="34" charset="-122"/>
                           <a:cs typeface="Consolas" pitchFamily="34" charset="-120"/>
                         </a:rPr>
-                        <a:t>22</a:t>
+                        <a:t>34</a:t>
                       </a:r>
                       <a:endParaRPr lang="en-US" sz="1100" dirty="0">
                         <a:latin typeface="Consolas" charset="0"/>
@@ -10140,7 +10140,7 @@
                           <a:ea typeface="Consolas" pitchFamily="34" charset="-122"/>
                           <a:cs typeface="Consolas" pitchFamily="34" charset="-120"/>
                         </a:rPr>
-                        <a:t>45.5%</a:t>
+                        <a:t>52.9%</a:t>
                       </a:r>
                       <a:endParaRPr lang="en-US" sz="1100" dirty="0">
                         <a:latin typeface="Consolas" charset="0"/>
@@ -10205,7 +10205,7 @@
                           <a:ea typeface="Consolas" pitchFamily="34" charset="-122"/>
                           <a:cs typeface="Consolas" pitchFamily="34" charset="-120"/>
                         </a:rPr>
-                        <a:t>0.196</a:t>
+                        <a:t>0.245</a:t>
                       </a:r>
                       <a:endParaRPr lang="en-US" sz="1100" dirty="0">
                         <a:latin typeface="Consolas" charset="0"/>
@@ -10270,7 +10270,7 @@
                           <a:ea typeface="Georgia" pitchFamily="34" charset="-122"/>
                           <a:cs typeface="Georgia" pitchFamily="34" charset="-120"/>
                         </a:rPr>
-                        <a:t>Best-calibrated band</a:t>
+                        <a:t>Best of three — level with chance</a:t>
                       </a:r>
                       <a:endParaRPr lang="en-US" sz="1100" dirty="0">
                         <a:latin typeface="Georgia" charset="0"/>
@@ -10402,7 +10402,7 @@
                           <a:ea typeface="Consolas" pitchFamily="34" charset="-122"/>
                           <a:cs typeface="Consolas" pitchFamily="34" charset="-120"/>
                         </a:rPr>
-                        <a:t>71</a:t>
+                        <a:t>63</a:t>
                       </a:r>
                       <a:endParaRPr lang="en-US" sz="1100" dirty="0">
                         <a:latin typeface="Consolas" charset="0"/>
@@ -10467,7 +10467,7 @@
                           <a:ea typeface="Consolas" pitchFamily="34" charset="-122"/>
                           <a:cs typeface="Consolas" pitchFamily="34" charset="-120"/>
                         </a:rPr>
-                        <a:t>25.4%</a:t>
+                        <a:t>22.2%</a:t>
                       </a:r>
                       <a:endParaRPr lang="en-US" sz="1100" dirty="0">
                         <a:latin typeface="Consolas" charset="0"/>
@@ -10532,7 +10532,7 @@
                           <a:ea typeface="Consolas" pitchFamily="34" charset="-122"/>
                           <a:cs typeface="Consolas" pitchFamily="34" charset="-120"/>
                         </a:rPr>
-                        <a:t>0.353</a:t>
+                        <a:t>0.393</a:t>
                       </a:r>
                       <a:endParaRPr lang="en-US" sz="1100" dirty="0">
                         <a:latin typeface="Consolas" charset="0"/>
@@ -10729,7 +10729,7 @@
                           <a:ea typeface="Consolas" pitchFamily="34" charset="-122"/>
                           <a:cs typeface="Consolas" pitchFamily="34" charset="-120"/>
                         </a:rPr>
-                        <a:t>17</a:t>
+                        <a:t>12</a:t>
                       </a:r>
                       <a:endParaRPr lang="en-US" sz="1100" dirty="0">
                         <a:latin typeface="Consolas" charset="0"/>
@@ -10794,7 +10794,7 @@
                           <a:ea typeface="Consolas" pitchFamily="34" charset="-122"/>
                           <a:cs typeface="Consolas" pitchFamily="34" charset="-120"/>
                         </a:rPr>
-                        <a:t>41.2%</a:t>
+                        <a:t>41.7%</a:t>
                       </a:r>
                       <a:endParaRPr lang="en-US" sz="1100" dirty="0">
                         <a:latin typeface="Consolas" charset="0"/>
@@ -10859,7 +10859,7 @@
                           <a:ea typeface="Consolas" pitchFamily="34" charset="-122"/>
                           <a:cs typeface="Consolas" pitchFamily="34" charset="-120"/>
                         </a:rPr>
-                        <a:t>0.297</a:t>
+                        <a:t>0.280</a:t>
                       </a:r>
                       <a:endParaRPr lang="en-US" sz="1100" dirty="0">
                         <a:latin typeface="Consolas" charset="0"/>
@@ -11013,7 +11013,7 @@
                 <a:ea typeface="Georgia" pitchFamily="34" charset="-122"/>
                 <a:cs typeface="Georgia" pitchFamily="34" charset="-120"/>
               </a:rPr>
-              <a:t>Brier: mean squared error between stated confidence and outcome. Lower is better; 0.25 is a coin flip called at 50%. The swing band is materially worse than chance and the system says so — it is now the primary target of the investigation loop.</a:t>
+              <a:t>Brier: mean squared error between stated confidence and outcome. Lower is better; 0.25 is a coin flip called at 50%. All 126 resolved predictions with a score, as at 23 Aug 2026 — no band meaningfully beats a coin flip (tactical edges it by 0.005 on n=34, which is noise). The swing band is materially worse than chance and the system says so — it is now the primary target of the investigation loop.</a:t>
             </a:r>
             <a:endParaRPr lang="en-US" sz="1100" dirty="0"/>
           </a:p>
@@ -11116,7 +11116,7 @@
                 <a:ea typeface="Consolas" pitchFamily="34" charset="-122"/>
                 <a:cs typeface="Consolas" pitchFamily="34" charset="-120"/>
               </a:rPr>
-              <a:t>17 resolved · 52.9%</a:t>
+              <a:t>33 resolved · 54.5%</a:t>
             </a:r>
             <a:endParaRPr lang="en-US" sz="1600" dirty="0"/>
           </a:p>
@@ -11155,7 +11155,7 @@
                 <a:ea typeface="Georgia" pitchFamily="34" charset="-122"/>
                 <a:cs typeface="Georgia" pitchFamily="34" charset="-120"/>
               </a:rPr>
-              <a:t>Brier 0.126 — encouraging, far too small to be evidence</a:t>
+              <a:t>Brier 0.244 vs 0.25 for a coin flip — indistinguishable from chance</a:t>
             </a:r>
             <a:endParaRPr lang="en-US" sz="1000" dirty="0"/>
           </a:p>
@@ -11258,7 +11258,7 @@
                 <a:ea typeface="Consolas" pitchFamily="34" charset="-122"/>
                 <a:cs typeface="Consolas" pitchFamily="34" charset="-120"/>
               </a:rPr>
-              <a:t>0.020 error</a:t>
+              <a:t>0.074 error</a:t>
             </a:r>
             <a:endParaRPr lang="en-US" sz="1600" dirty="0"/>
           </a:p>
@@ -11297,7 +11297,7 @@
                 <a:ea typeface="Georgia" pitchFamily="34" charset="-122"/>
                 <a:cs typeface="Georgia" pitchFamily="34" charset="-120"/>
               </a:rPr>
-              <a:t>Stated 0.553 vs realised 0.533</a:t>
+              <a:t>Stated 0.547 vs realised 0.474</a:t>
             </a:r>
             <a:endParaRPr lang="en-US" sz="1000" dirty="0"/>
           </a:p>
@@ -11707,7 +11707,7 @@
         <p:spPr>
           <a:xfrm>
             <a:off x="1847088" y="3611880"/>
-            <a:ext cx="2730581" cy="237744"/>
+            <a:ext cx="2700955" cy="237744"/>
           </a:xfrm>
           <a:prstGeom prst="rect">
             <a:avLst/>
@@ -11756,7 +11756,7 @@
                 <a:ea typeface="Consolas" pitchFamily="34" charset="-122"/>
                 <a:cs typeface="Consolas" pitchFamily="34" charset="-120"/>
               </a:rPr>
-              <a:t>0.553</a:t>
+              <a:t>0.547</a:t>
             </a:r>
             <a:endParaRPr lang="en-US" sz="1100" dirty="0"/>
           </a:p>
@@ -11835,7 +11835,7 @@
         <p:spPr>
           <a:xfrm>
             <a:off x="1847088" y="4032504"/>
-            <a:ext cx="2631826" cy="237744"/>
+            <a:ext cx="2340498" cy="237744"/>
           </a:xfrm>
           <a:prstGeom prst="rect">
             <a:avLst/>
@@ -11884,7 +11884,7 @@
                 <a:ea typeface="Consolas" pitchFamily="34" charset="-122"/>
                 <a:cs typeface="Consolas" pitchFamily="34" charset="-120"/>
               </a:rPr>
-              <a:t>0.533</a:t>
+              <a:t>0.474</a:t>
             </a:r>
             <a:endParaRPr lang="en-US" sz="1100" dirty="0"/>
           </a:p>
@@ -11923,7 +11923,7 @@
                 <a:ea typeface="Georgia" pitchFamily="34" charset="-122"/>
                 <a:cs typeface="Georgia" pitchFamily="34" charset="-120"/>
               </a:rPr>
-              <a:t>Confidence bucket 0.40–0.60, n = 15.</a:t>
+              <a:t>Confidence bucket 0.40–0.60, n = 57.</a:t>
             </a:r>
             <a:endParaRPr lang="en-US" sz="1050" dirty="0"/>
           </a:p>

--- a/docs/ANTON-Markets-Analytics.pptx
+++ b/docs/ANTON-Markets-Analytics.pptx
@@ -11013,7 +11013,7 @@
                 <a:ea typeface="Georgia" pitchFamily="34" charset="-122"/>
                 <a:cs typeface="Georgia" pitchFamily="34" charset="-120"/>
               </a:rPr>
-              <a:t>Brier: mean squared error between stated confidence and outcome. Lower is better; 0.25 is a coin flip called at 50%. All 126 resolved predictions with a score, as at 23 Aug 2026 — no band meaningfully beats a coin flip (tactical edges it by 0.005 on n=34, which is noise). The swing band is materially worse than chance and the system says so — it is now the primary target of the investigation loop.</a:t>
+              <a:t>Brier: mean squared error between stated confidence and outcome. Lower is better; 0.25 is a coin flip called at 50%. All 126 resolved predictions with a score, as at 23 Aug 2026 — no band meaningfully beats a coin flip (tactical edges it by 0.005 on n=34, which is noise). Every prediction resolved since the August rebuild sits in the tactical row; the swing and position rows are entirely pre-rebuild. The swing band is materially worse than chance and the system says so — it is now the primary target of the investigation loop.</a:t>
             </a:r>
             <a:endParaRPr lang="en-US" sz="1100" dirty="0"/>
           </a:p>
@@ -11155,7 +11155,7 @@
                 <a:ea typeface="Georgia" pitchFamily="34" charset="-122"/>
                 <a:cs typeface="Georgia" pitchFamily="34" charset="-120"/>
               </a:rPr>
-              <a:t>Brier 0.244 vs 0.25 for a coin flip — indistinguishable from chance</a:t>
+              <a:t>Brier 0.244 vs 0.25 for a coin flip — indistinguishable from chance. All 33 are 2–3 day calls stated at 0.52–0.66; nothing longer has matured.</a:t>
             </a:r>
             <a:endParaRPr lang="en-US" sz="1000" dirty="0"/>
           </a:p>
@@ -11923,7 +11923,7 @@
                 <a:ea typeface="Georgia" pitchFamily="34" charset="-122"/>
                 <a:cs typeface="Georgia" pitchFamily="34" charset="-120"/>
               </a:rPr>
-              <a:t>Confidence bucket 0.40–0.60, n = 57.</a:t>
+              <a:t>Confidence bucket 0.40–0.60, n = 57. The inversion is visible in the pre-rebuild record (0.44→0.67, 0.65→0.28, 0.81→0.14) and absent from the post-rebuild one (0.56→0.54, 0.61→0.57).</a:t>
             </a:r>
             <a:endParaRPr lang="en-US" sz="1050" dirty="0"/>
           </a:p>
